--- a/docs/tutorial-obo/tutorial-obo.pptx
+++ b/docs/tutorial-obo/tutorial-obo.pptx
@@ -4035,7 +4035,7 @@
                   <a:srgbClr val="202020"/>
                 </a:solidFill>
               </a:rPr>
-              <a:t>• Reverter isFallbackPublicClient para false, se a API não precisava disso antes.</a:t>
+              <a:t>• Manter a pré-autorização do Azure CLI em obo-api (permanente — não concede acesso extra por si só).</a:t>
             </a:r>
           </a:p>
           <a:p>
@@ -4652,7 +4652,7 @@
                 </a:solidFill>
               </a:rPr>
               <a:t>Camada 1
-device code login
+AzureCliCredential
 hop 1: user_impersonation</a:t>
             </a:r>
           </a:p>
@@ -5045,7 +5045,7 @@
                   <a:srgbClr val="202020"/>
                 </a:solidFill>
               </a:rPr>
-              <a:t>• Login no tenant do lab, em um perfil isolado se você usa múltiplos tenants:</a:t>
+              <a:t>• Login prévio no Azure CLI no tenant do lab (perfil isolado se você usa múltiplos tenants):</a:t>
             </a:r>
           </a:p>
           <a:p>
@@ -5075,7 +5075,22 @@
                   <a:srgbClr val="202020"/>
                 </a:solidFill>
               </a:rPr>
-              <a:t>– az login --tenant "&lt;tenantId&gt;" --allow-no-subscriptions --use-device-code</a:t>
+              <a:t>– az login --tenant "&lt;tenantId&gt;" --allow-no-subscriptions</a:t>
+            </a:r>
+          </a:p>
+          <a:p>
+            <a:pPr>
+              <a:spcAft>
+                <a:spcPts val="1000"/>
+              </a:spcAft>
+            </a:pPr>
+            <a:r>
+              <a:rPr sz="2000">
+                <a:solidFill>
+                  <a:srgbClr val="202020"/>
+                </a:solidFill>
+              </a:rPr>
+              <a:t>• Os consoles reaproveitam essa sessão via AzureCliCredential (nenhum device code).</a:t>
             </a:r>
           </a:p>
           <a:p>
@@ -5283,7 +5298,7 @@
                   <a:srgbClr val="202020"/>
                 </a:solidFill>
               </a:rPr>
-              <a:t>• 2. Habilitar isFallbackPublicClient em obo-api (permite device code no console).</a:t>
+              <a:t>• 2. Pré-autorizar o Azure CLI (appId first-party) em obo-api (evita AADSTS65001 em tenants com consentimento restrito).</a:t>
             </a:r>
           </a:p>
           <a:p>
@@ -5351,7 +5366,7 @@
                   <a:srgbClr val="606060"/>
                 </a:solidFill>
               </a:rPr>
-              <a:t>• Todos os quatro passos são documentados com o comando az exato e com o passo de rollback correspondente em docs/tutorial-obo/README.md.</a:t>
+              <a:t>• Passos 1, 3 e 4 são temporários e reversíveis (ver Limpeza); o passo 2 é permanente e documentado com o comando az exato em docs/tutorial-obo/README.md.</a:t>
             </a:r>
           </a:p>
         </p:txBody>
@@ -5588,7 +5603,7 @@
                   <a:srgbClr val="202020"/>
                 </a:solidFill>
               </a:rPr>
-              <a:t>• Abre um fluxo de device code: acesse a URL indicada e faça login como o usuário de teste.</a:t>
+              <a:t>• Reaproveita a sessão já autenticada do az login via AzureCliCredential — nenhuma interação aqui.</a:t>
             </a:r>
           </a:p>
           <a:p>
@@ -5603,7 +5618,7 @@
                   <a:srgbClr val="202020"/>
                 </a:solidFill>
               </a:rPr>
-              <a:t>• Solicita um token para api://&lt;api-appId&gt;/user_impersonation.</a:t>
+              <a:t>• Solicita um token para api://&lt;api-appId&gt;/.default (formato exigido pelo AzureCliCredential).</a:t>
             </a:r>
           </a:p>
           <a:p>
@@ -5816,39 +5831,7 @@
                 </a:solidFill>
                 <a:latin typeface="Consolas"/>
               </a:rPr>
-              <a:t>Fazendo login como o usuário de teste (Device Code)...</a:t>
-            </a:r>
-          </a:p>
-          <a:p>
-            <a:pPr>
-              <a:spcAft>
-                <a:spcPts val="400"/>
-              </a:spcAft>
-            </a:pPr>
-            <a:r>
-              <a:rPr sz="1600">
-                <a:solidFill>
-                  <a:srgbClr val="D4D4D4"/>
-                </a:solidFill>
-                <a:latin typeface="Consolas"/>
-              </a:rPr>
-              <a:t>To sign in, use a web browser to open the page</a:t>
-            </a:r>
-          </a:p>
-          <a:p>
-            <a:pPr>
-              <a:spcAft>
-                <a:spcPts val="400"/>
-              </a:spcAft>
-            </a:pPr>
-            <a:r>
-              <a:rPr sz="1600">
-                <a:solidFill>
-                  <a:srgbClr val="D4D4D4"/>
-                </a:solidFill>
-                <a:latin typeface="Consolas"/>
-              </a:rPr>
-              <a:t>https://login.microsoft.com/device and enter the code ABCD1234</a:t>
+              <a:t>Obtendo token via login existente do Azure CLI (az login)...</a:t>
             </a:r>
           </a:p>
           <a:p>
